--- a/MemGate_Capstone_Review2_NMIMS.pptx
+++ b/MemGate_Capstone_Review2_NMIMS.pptx
@@ -10181,7 +10181,7 @@
                 <a:gridCol w="2926079"/>
                 <a:gridCol w="4572000"/>
               </a:tblGrid>
-              <a:tr h="658368">
+              <a:tr h="548640">
                 <a:tc>
                   <a:txBody>
                     <a:bodyPr/>
@@ -10273,7 +10273,7 @@
                   <a:tcPr anchor="ctr" marL="128016" marR="91440" marT="27432" marB="27432"/>
                 </a:tc>
               </a:tr>
-              <a:tr h="658368">
+              <a:tr h="548640">
                 <a:tc>
                   <a:txBody>
                     <a:bodyPr/>
@@ -10369,7 +10369,7 @@
                   <a:tcPr anchor="ctr" marL="128016" marR="91440" marT="27432" marB="27432"/>
                 </a:tc>
               </a:tr>
-              <a:tr h="658368">
+              <a:tr h="548640">
                 <a:tc>
                   <a:txBody>
                     <a:bodyPr/>
@@ -10465,7 +10465,7 @@
                   <a:tcPr anchor="ctr" marL="128016" marR="91440" marT="27432" marB="27432"/>
                 </a:tc>
               </a:tr>
-              <a:tr h="658368">
+              <a:tr h="548640">
                 <a:tc>
                   <a:txBody>
                     <a:bodyPr/>
@@ -10561,7 +10561,7 @@
                   <a:tcPr anchor="ctr" marL="128016" marR="91440" marT="27432" marB="27432"/>
                 </a:tc>
               </a:tr>
-              <a:tr h="658368">
+              <a:tr h="548640">
                 <a:tc>
                   <a:txBody>
                     <a:bodyPr/>
@@ -10647,6 +10647,102 @@
                           <a:latin typeface="Times New Roman"/>
                         </a:rPr>
                         <a:t>-21.0  [-33.9, -8.1]</a:t>
+                      </a:r>
+                    </a:p>
+                  </a:txBody>
+                  <a:tcPr anchor="ctr" marL="128016" marR="91440" marT="27432" marB="27432"/>
+                </a:tc>
+              </a:tr>
+              <a:tr h="548640">
+                <a:tc>
+                  <a:txBody>
+                    <a:bodyPr/>
+                    <a:lstStyle/>
+                    <a:p>
+                      <a:r>
+                        <a:rPr sz="1900" b="0" i="0">
+                          <a:solidFill>
+                            <a:srgbClr val="1A1A1A"/>
+                          </a:solidFill>
+                          <a:latin typeface="Times New Roman"/>
+                        </a:rPr>
+                        <a:t>32,768</a:t>
+                      </a:r>
+                    </a:p>
+                  </a:txBody>
+                  <a:tcPr anchor="ctr" marL="128016" marR="91440" marT="27432" marB="27432"/>
+                </a:tc>
+                <a:tc>
+                  <a:txBody>
+                    <a:bodyPr/>
+                    <a:lstStyle/>
+                    <a:p>
+                      <a:pPr algn="r"/>
+                      <a:r>
+                        <a:rPr sz="1900" b="0" i="0">
+                          <a:solidFill>
+                            <a:srgbClr val="1A1A1A"/>
+                          </a:solidFill>
+                          <a:latin typeface="Times New Roman"/>
+                        </a:rPr>
+                        <a:t>31.4%</a:t>
+                      </a:r>
+                    </a:p>
+                  </a:txBody>
+                  <a:tcPr anchor="ctr" marL="128016" marR="91440" marT="27432" marB="27432"/>
+                </a:tc>
+                <a:tc>
+                  <a:txBody>
+                    <a:bodyPr/>
+                    <a:lstStyle/>
+                    <a:p>
+                      <a:pPr algn="r"/>
+                      <a:r>
+                        <a:rPr sz="1900" b="0" i="0">
+                          <a:solidFill>
+                            <a:srgbClr val="1A1A1A"/>
+                          </a:solidFill>
+                          <a:latin typeface="Times New Roman"/>
+                        </a:rPr>
+                        <a:t>30.6%</a:t>
+                      </a:r>
+                    </a:p>
+                  </a:txBody>
+                  <a:tcPr anchor="ctr" marL="128016" marR="91440" marT="27432" marB="27432"/>
+                </a:tc>
+                <a:tc>
+                  <a:txBody>
+                    <a:bodyPr/>
+                    <a:lstStyle/>
+                    <a:p>
+                      <a:pPr algn="r"/>
+                      <a:r>
+                        <a:rPr sz="1900" b="0" i="0">
+                          <a:solidFill>
+                            <a:srgbClr val="1A1A1A"/>
+                          </a:solidFill>
+                          <a:latin typeface="Times New Roman"/>
+                        </a:rPr>
+                        <a:t>51.6%</a:t>
+                      </a:r>
+                    </a:p>
+                  </a:txBody>
+                  <a:tcPr anchor="ctr" marL="128016" marR="91440" marT="27432" marB="27432"/>
+                </a:tc>
+                <a:tc>
+                  <a:txBody>
+                    <a:bodyPr/>
+                    <a:lstStyle/>
+                    <a:p>
+                      <a:pPr algn="r"/>
+                      <a:r>
+                        <a:rPr sz="1900" b="0" i="0">
+                          <a:solidFill>
+                            <a:srgbClr val="1A1A1A"/>
+                          </a:solidFill>
+                          <a:latin typeface="Times New Roman"/>
+                        </a:rPr>
+                        <a:t>-21.0  [-35.5, -6.5]</a:t>
                       </a:r>
                     </a:p>
                   </a:txBody>
@@ -10666,7 +10762,7 @@
         <p:spPr>
           <a:xfrm>
             <a:off x="822960" y="6172200"/>
-            <a:ext cx="16642080" cy="936244"/>
+            <a:ext cx="16642080" cy="1272286"/>
           </a:xfrm>
           <a:prstGeom prst="rect">
             <a:avLst/>
@@ -10712,7 +10808,7 @@
                 </a:solidFill>
                 <a:latin typeface="Times New Roman"/>
               </a:rPr>
-              <a:t>— where LoCoMo gives +8.67. RAG scales as a cache must, 9.7% → 40.3%; P1-S peaks at 8,192 and then flattens.</a:t>
+              <a:t>— where LoCoMo gives +8.67, and the deficit is the same −20.97 at the next budget up. Selection does benefit from storage; it benefits consistently less than plain FIFO does.</a:t>
             </a:r>
           </a:p>
         </p:txBody>

--- a/MemGate_Capstone_Review2_NMIMS.pptx
+++ b/MemGate_Capstone_Review2_NMIMS.pptx
@@ -12472,32 +12472,31 @@
                     <a:lstStyle/>
                     <a:p>
                       <a:r>
+                        <a:rPr sz="1800" b="1" i="0">
+                          <a:solidFill>
+                            <a:srgbClr val="C1272D"/>
+                          </a:solidFill>
+                          <a:latin typeface="Times New Roman"/>
+                        </a:rPr>
+                        <a:t>Complete</a:t>
+                      </a:r>
+                    </a:p>
+                  </a:txBody>
+                  <a:tcPr anchor="ctr" marL="128016" marR="91440" marT="27432" marB="27432"/>
+                </a:tc>
+                <a:tc>
+                  <a:txBody>
+                    <a:bodyPr/>
+                    <a:lstStyle/>
+                    <a:p>
+                      <a:r>
                         <a:rPr sz="1800" b="0" i="0">
                           <a:solidFill>
                             <a:srgbClr val="1A1A1A"/>
                           </a:solidFill>
                           <a:latin typeface="Times New Roman"/>
                         </a:rPr>
-                        <a:t>Pilot only</a:t>
-                      </a:r>
-                    </a:p>
-                  </a:txBody>
-                  <a:tcPr anchor="ctr" marL="128016" marR="91440" marT="27432" marB="27432"/>
-                </a:tc>
-                <a:tc>
-                  <a:txBody>
-                    <a:bodyPr/>
-                    <a:lstStyle/>
-                    <a:p>
-                      <a:pPr algn="r"/>
-                      <a:r>
-                        <a:rPr sz="1800" b="0" i="0">
-                          <a:solidFill>
-                            <a:srgbClr val="1A1A1A"/>
-                          </a:solidFill>
-                          <a:latin typeface="Times New Roman"/>
-                        </a:rPr>
-                        <a:t>1 and 2 conversations — intervals not yet quotable</a:t>
+                        <a:t>all ten conversations; both revised a claim of ours</a:t>
                       </a:r>
                     </a:p>
                   </a:txBody>
@@ -16976,7 +16975,7 @@
                 </a:solidFill>
                 <a:latin typeface="Times New Roman"/>
               </a:rPr>
-              <a:t>Compression tested is extractive. The negative result is stated for that case only.</a:t>
+              <a:t>Compression is now tested in both forms: rewriting beats word-selection by +4.1 answer points and still loses to dropping by 2.7, at 1,850x the cost. Untested: a larger summariser.</a:t>
             </a:r>
           </a:p>
           <a:p>
@@ -17178,7 +17177,7 @@
                 </a:solidFill>
                 <a:latin typeface="Times New Roman"/>
               </a:rPr>
-              <a:t>A scorer that transfers across corpora. LongMemEval turned this from a nice-to-have into the project's live question.</a:t>
+              <a:t>A scorer that transfers across corpora. Every other track is closed; this is what the final review should be about.</a:t>
             </a:r>
             <a:r>
               <a:rPr sz="1800" b="0" i="1">
@@ -17215,7 +17214,7 @@
                 </a:solidFill>
                 <a:latin typeface="Times New Roman"/>
               </a:rPr>
-              <a:t>Abstractive compression to all ten conversations. Built and running, but the result on disk is one conversation — a single cluster, so its intervals are degenerate and not quotable.</a:t>
+              <a:t>P4 online, re-learning per corpus, run on LongMemEval. It reaches parity on LoCoMo without labels — but the cues it learns are the ones LongMemEval inverts.</a:t>
             </a:r>
             <a:r>
               <a:rPr sz="1800" b="0" i="1">
@@ -17224,7 +17223,7 @@
                 </a:solidFill>
                 <a:latin typeface="Times New Roman"/>
               </a:rPr>
-              <a:t>   ~4 h of generation</a:t>
+              <a:t>   the obvious first try</a:t>
             </a:r>
           </a:p>
           <a:p>
@@ -17252,7 +17251,7 @@
                 </a:solidFill>
                 <a:latin typeface="Times New Roman"/>
               </a:rPr>
-              <a:t>Online learning of the eviction policy — the only route that makes a learned scorer deployable. Built; pilot-scale at two conversations.</a:t>
+              <a:t>A larger summariser. Rewriting is worth +4.1 answer points over word-selection; whether a bigger model closes the last 2.7 to dropping is untested.</a:t>
             </a:r>
             <a:r>
               <a:rPr sz="1800" b="0" i="1">
@@ -17289,7 +17288,7 @@
                 </a:solidFill>
                 <a:latin typeface="Times New Roman"/>
               </a:rPr>
-              <a:t>The S=32,768 LongMemEval point, to close the retention sweep.</a:t>
+              <a:t>A second reader model, to separate the memory layer from this one.</a:t>
             </a:r>
             <a:r>
               <a:rPr sz="1800" b="0" i="1">
@@ -17298,7 +17297,7 @@
                 </a:solidFill>
                 <a:latin typeface="Times New Roman"/>
               </a:rPr>
-              <a:t>   ~20 min, alone</a:t>
+              <a:t>   1 session</a:t>
             </a:r>
           </a:p>
         </p:txBody>
